--- a/Microservices/05.01. Microservices Deployment.pptx
+++ b/Microservices/05.01. Microservices Deployment.pptx
@@ -230,7 +230,7 @@
             <a:fld id="{2F0940CE-BE1D-4C40-AF8B-3898A4D1F5EC}" type="datetimeFigureOut">
               <a:rPr lang="en-US" smtClean="0"/>
               <a:pPr/>
-              <a:t>12/30/2025</a:t>
+              <a:t>7/7/2026</a:t>
             </a:fld>
             <a:endParaRPr lang="en-US"/>
           </a:p>
@@ -769,7 +769,7 @@
               <a:pPr>
                 <a:defRPr/>
               </a:pPr>
-              <a:t>12/30/2025</a:t>
+              <a:t>7/7/2026</a:t>
             </a:fld>
             <a:endParaRPr lang="en-US"/>
           </a:p>
@@ -961,7 +961,7 @@
               <a:pPr>
                 <a:defRPr/>
               </a:pPr>
-              <a:t>12/30/2025</a:t>
+              <a:t>7/7/2026</a:t>
             </a:fld>
             <a:endParaRPr lang="en-US"/>
           </a:p>
@@ -1163,7 +1163,7 @@
               <a:pPr>
                 <a:defRPr/>
               </a:pPr>
-              <a:t>12/30/2025</a:t>
+              <a:t>7/7/2026</a:t>
             </a:fld>
             <a:endParaRPr lang="en-US"/>
           </a:p>
@@ -1355,7 +1355,7 @@
               <a:pPr>
                 <a:defRPr/>
               </a:pPr>
-              <a:t>12/30/2025</a:t>
+              <a:t>7/7/2026</a:t>
             </a:fld>
             <a:endParaRPr lang="en-US"/>
           </a:p>
@@ -1623,7 +1623,7 @@
               <a:pPr>
                 <a:defRPr/>
               </a:pPr>
-              <a:t>12/30/2025</a:t>
+              <a:t>7/7/2026</a:t>
             </a:fld>
             <a:endParaRPr lang="en-US"/>
           </a:p>
@@ -1933,7 +1933,7 @@
               <a:pPr>
                 <a:defRPr/>
               </a:pPr>
-              <a:t>12/30/2025</a:t>
+              <a:t>7/7/2026</a:t>
             </a:fld>
             <a:endParaRPr lang="en-US"/>
           </a:p>
@@ -2377,7 +2377,7 @@
               <a:pPr>
                 <a:defRPr/>
               </a:pPr>
-              <a:t>12/30/2025</a:t>
+              <a:t>7/7/2026</a:t>
             </a:fld>
             <a:endParaRPr lang="en-US"/>
           </a:p>
@@ -2517,7 +2517,7 @@
               <a:pPr>
                 <a:defRPr/>
               </a:pPr>
-              <a:t>12/30/2025</a:t>
+              <a:t>7/7/2026</a:t>
             </a:fld>
             <a:endParaRPr lang="en-US"/>
           </a:p>
@@ -2634,7 +2634,7 @@
               <a:pPr>
                 <a:defRPr/>
               </a:pPr>
-              <a:t>12/30/2025</a:t>
+              <a:t>7/7/2026</a:t>
             </a:fld>
             <a:endParaRPr lang="en-US"/>
           </a:p>
@@ -2933,7 +2933,7 @@
               <a:pPr>
                 <a:defRPr/>
               </a:pPr>
-              <a:t>12/30/2025</a:t>
+              <a:t>7/7/2026</a:t>
             </a:fld>
             <a:endParaRPr lang="en-US"/>
           </a:p>
@@ -3211,7 +3211,7 @@
               <a:pPr>
                 <a:defRPr/>
               </a:pPr>
-              <a:t>12/30/2025</a:t>
+              <a:t>7/7/2026</a:t>
             </a:fld>
             <a:endParaRPr lang="en-US"/>
           </a:p>
@@ -3459,7 +3459,7 @@
               <a:pPr>
                 <a:defRPr/>
               </a:pPr>
-              <a:t>12/30/2025</a:t>
+              <a:t>7/7/2026</a:t>
             </a:fld>
             <a:endParaRPr lang="en-US"/>
           </a:p>
@@ -4445,7 +4445,6 @@
               <a:rPr lang="en-US" sz="2400" dirty="0" smtClean="0"/>
               <a:t> Publishing.</a:t>
             </a:r>
-            <a:endParaRPr lang="en-US" sz="2400" dirty="0" smtClean="0"/>
           </a:p>
         </p:txBody>
       </p:sp>
@@ -4604,7 +4603,7 @@
           <a:p>
             <a:r>
               <a:rPr lang="en-US" dirty="0" smtClean="0"/>
-              <a:t>Bulkheads [4]</a:t>
+              <a:t>Bulkheads</a:t>
             </a:r>
             <a:endParaRPr lang="en-US" dirty="0"/>
           </a:p>
